--- a/企業AI系統架構圖.pptx
+++ b/企業AI系統架構圖.pptx
@@ -3127,7 +3127,7 @@
               </a:defRPr>
             </a:pPr>
             <a:r>
-              <a:t>企業 AI 完整系統架構圖 — 從基礎設施到 Agent 編排</a:t>
+              <a:t>企業 AI 完整系統架構圖 — 從基礎設施到 Agent 調度</a:t>
             </a:r>
           </a:p>
         </p:txBody>
@@ -4297,7 +4297,7 @@
               </a:defRPr>
             </a:pPr>
             <a:r>
-              <a:t>Agent 編排</a:t>
+              <a:t>Agent 調度</a:t>
             </a:r>
           </a:p>
         </p:txBody>
@@ -4337,7 +4337,7 @@
             </a:r>
             <a:br/>
             <a:r>
-              <a:t>多代理協作、任務分派</a:t>
+              <a:t>多 Agent 協作、任務分派</a:t>
             </a:r>
           </a:p>
         </p:txBody>
